--- a/en/slides/15-Computer_Architecture-Memory-Lab.pptx
+++ b/en/slides/15-Computer_Architecture-Memory-Lab.pptx
@@ -123,33 +123,33 @@
   <p:extLst>
     <p:ext uri="{521415D9-36F7-43E2-AB2F-B90AF26B5E84}">
       <p14:sectionLst xmlns:p14="http://schemas.microsoft.com/office/powerpoint/2010/main">
-        <p14:section name="Opening" id="{b0467bcb-ed12-7db2-568a-dc0c337711c7}">
+        <p14:section name="Opening" id="{e47ab763-5b49-b00d-87b3-33ebb94d4d5b}">
           <p14:sldIdLst>
             <p14:sldId id="256"/>
             <p14:sldId id="257"/>
           </p14:sldIdLst>
         </p14:section>
-        <p14:section name="Warm-up on the machine" id="{e1b12c20-9db1-00b4-eae3-6e0915377eb2}">
+        <p14:section name="Warm-up on the machine" id="{02c95b80-894d-0841-e4d0-68237186725c}">
           <p14:sldIdLst>
             <p14:sldId id="258"/>
           </p14:sldIdLst>
         </p14:section>
-        <p14:section name="The main memory" id="{7ba21ed6-1301-a07a-d98d-26d9b413c621}">
+        <p14:section name="The main memory" id="{a4f0a0b0-7d00-3a3f-9156-c35e0cd7e72c}">
           <p14:sldIdLst>
             <p14:sldId id="259"/>
           </p14:sldIdLst>
         </p14:section>
-        <p14:section name="Processor and memory" id="{de3d9686-aa07-06dc-0713-382afc513e07}">
+        <p14:section name="Processor and memory" id="{8c85d767-ed9b-df17-43ab-f4be13f97309}">
           <p14:sldIdLst>
             <p14:sldId id="260"/>
           </p14:sldIdLst>
         </p14:section>
-        <p14:section name="Memory and input/output" id="{b7b810d5-25f3-59c3-accd-8bfd61437eba}">
+        <p14:section name="Memory and input/output" id="{86e346b3-9d7b-607d-7d44-107ed4c2e2f8}">
           <p14:sldIdLst>
             <p14:sldId id="261"/>
           </p14:sldIdLst>
         </p14:section>
-        <p14:section name="The complete program" id="{8f3933f7-cb9b-efce-abf7-e93b11460222}">
+        <p14:section name="The complete program" id="{8c3c603b-b30a-8766-2a93-228b1a9f876f}">
           <p14:sldIdLst>
             <p14:sldId id="262"/>
             <p14:sldId id="263"/>
@@ -158,7 +158,7 @@
             <p14:sldId id="266"/>
           </p14:sldIdLst>
         </p14:section>
-        <p14:section name="Run it and test it" id="{7e11895b-91e9-cd8c-5b4a-9ccaf1e1c01c}">
+        <p14:section name="Run it and test it" id="{656ddb4b-eb29-8f95-faee-ff3bfda181c3}">
           <p14:sldIdLst>
             <p14:sldId id="267"/>
             <p14:sldId id="268"/>
@@ -167,7 +167,7 @@
             <p14:sldId id="271"/>
           </p14:sldIdLst>
         </p14:section>
-        <p14:section name="Exercises" id="{2a8517ab-0873-3b22-1cb8-63b4f57d133b}">
+        <p14:section name="Exercises" id="{59616591-b914-25ed-6250-47b1302e74e5}">
           <p14:sldIdLst>
             <p14:sldId id="272"/>
           </p14:sldIdLst>

--- a/en/slides/15-Computer_Architecture-Memory-Lab.pptx
+++ b/en/slides/15-Computer_Architecture-Memory-Lab.pptx
@@ -123,33 +123,33 @@
   <p:extLst>
     <p:ext uri="{521415D9-36F7-43E2-AB2F-B90AF26B5E84}">
       <p14:sectionLst xmlns:p14="http://schemas.microsoft.com/office/powerpoint/2010/main">
-        <p14:section name="Opening" id="{e47ab763-5b49-b00d-87b3-33ebb94d4d5b}">
+        <p14:section name="Opening" id="{32385b0f-e932-c9ed-bfae-ef17e69dbe54}">
           <p14:sldIdLst>
             <p14:sldId id="256"/>
             <p14:sldId id="257"/>
           </p14:sldIdLst>
         </p14:section>
-        <p14:section name="Warm-up on the machine" id="{02c95b80-894d-0841-e4d0-68237186725c}">
+        <p14:section name="Warm-up on the machine" id="{6fedca08-cfe8-8c39-9973-34762521cddd}">
           <p14:sldIdLst>
             <p14:sldId id="258"/>
           </p14:sldIdLst>
         </p14:section>
-        <p14:section name="The main memory" id="{a4f0a0b0-7d00-3a3f-9156-c35e0cd7e72c}">
+        <p14:section name="The main memory" id="{237f1b7d-3f65-f8c7-4b4b-cf767169a355}">
           <p14:sldIdLst>
             <p14:sldId id="259"/>
           </p14:sldIdLst>
         </p14:section>
-        <p14:section name="Processor and memory" id="{8c85d767-ed9b-df17-43ab-f4be13f97309}">
+        <p14:section name="Processor and memory" id="{8b6bedd1-aebf-e643-4161-054c0f8207bd}">
           <p14:sldIdLst>
             <p14:sldId id="260"/>
           </p14:sldIdLst>
         </p14:section>
-        <p14:section name="Memory and input/output" id="{86e346b3-9d7b-607d-7d44-107ed4c2e2f8}">
+        <p14:section name="Memory and input/output" id="{e9bfa364-2de0-1020-a67d-6f5b215fc2ac}">
           <p14:sldIdLst>
             <p14:sldId id="261"/>
           </p14:sldIdLst>
         </p14:section>
-        <p14:section name="The complete program" id="{8c3c603b-b30a-8766-2a93-228b1a9f876f}">
+        <p14:section name="The complete program" id="{14da7840-ba1c-5481-f52f-f21bd60376a0}">
           <p14:sldIdLst>
             <p14:sldId id="262"/>
             <p14:sldId id="263"/>
@@ -158,7 +158,7 @@
             <p14:sldId id="266"/>
           </p14:sldIdLst>
         </p14:section>
-        <p14:section name="Run it and test it" id="{656ddb4b-eb29-8f95-faee-ff3bfda181c3}">
+        <p14:section name="Run it and test it" id="{c2c0cb60-43d4-cbec-4c09-7c978314ed3d}">
           <p14:sldIdLst>
             <p14:sldId id="267"/>
             <p14:sldId id="268"/>
@@ -167,7 +167,7 @@
             <p14:sldId id="271"/>
           </p14:sldIdLst>
         </p14:section>
-        <p14:section name="Exercises" id="{59616591-b914-25ed-6250-47b1302e74e5}">
+        <p14:section name="Exercises" id="{e4e4907b-ffe5-325f-87b3-cf18ec617055}">
           <p14:sldIdLst>
             <p14:sldId id="272"/>
           </p14:sldIdLst>
@@ -578,7 +578,9 @@
               <a:rPr lang="en-US" dirty="0"/>
               <a:t>This is the code deck of Lecture 15. Where the lecture deck develops the concepts, this deck contains everything that is written and executed: each listing with its commentary, the complete program of the lecture, the output it is expected to produce, and the procedure for testing it on each of the three hosts. The two decks are meant to be read together: the concepts explain the code, and the code gives the concepts an observable consequence.
 Learning status: UNDERSTAND NOW, by the end of this lecture you explain it, trace it and apply it on your own; USE NOW, you follow and use the recipe today; how it works inside is explained later, or is not part of the course; UNDERSTAND LATER, recognise the name and what it is for; a later lecture explains it. A slide without a badge is context: a story, an example, a question, an exercise.
-Learning status of this lecture. UNDERSTAND NOW: memories and addresses; little-endian byte order; processor and memory; memory-mapped I/O. USE NOW: the complete program, the PRG32 tools (used, not studied, in this course). UNDERSTAND LATER: nothing. A slide without a badge is context: a story, an example, a question, an exercise.</a:t>
+Learning status of this lecture. UNDERSTAND NOW: memories and addresses; little-endian byte order; processor and memory; memory-mapped I/O. USE NOW: the complete program, the PRG32 tools (used, not studied, in this course). UNDERSTAND LATER: nothing. A slide without a badge is context: a story, an example, a question, an exercise.
+Roadmap. Today's outcomes: (1) compute the capacity of a memory from its address and data lines; (2) describe the interface between processor and memory during a load; (3) explain memory-mapped input/output. Builds on: little-endian byte order (Lecture 04). Next: Lecture 16, Permanent Memory.
+Bridge. Since Lecture 02, lw t1, 0(t0) has read a word at an address computed from t0. Today that address is the one placed on the address bus, register plus constant. Lecture 19 calls this base plus displacement and compares it with the other addressing modes. Recall: In lw t1, 8(t0), which address goes on the address bus?</a:t>
             </a:r>
             <a:endParaRPr lang="en-US" dirty="0"/>
           </a:p>
